--- a/sessions_in_Abu_Dhabi/session_5.pptx
+++ b/sessions_in_Abu_Dhabi/session_5.pptx
@@ -18,6 +18,7 @@
     <p:sldId id="266" r:id="rId12"/>
     <p:sldId id="267" r:id="rId13"/>
     <p:sldId id="268" r:id="rId14"/>
+    <p:sldId id="269" r:id="rId15"/>
   </p:sldIdLst>
   <p:sldSz cx="9144000" cy="5143500" type="screen16x9"/>
   <p:notesSz cx="6858000" cy="9144000"/>
@@ -3236,10 +3237,54 @@
                 <a:tableStyleId>{5C22544A-7EE6-4342-B048-85BDC9FD1C3A}</a:tableStyleId>
               </a:tblPr>
               <a:tblGrid>
-                <a:gridCol w="2743200"/>
-                <a:gridCol w="2743200"/>
-                <a:gridCol w="2743200"/>
+                <a:gridCol w="2616200"/>
+                <a:gridCol w="2806700"/>
+                <a:gridCol w="2806700"/>
               </a:tblGrid>
+              <a:tr h="0">
+                <a:tc>
+                  <a:txBody>
+                    <a:bodyPr/>
+                    <a:lstStyle/>
+                    <a:p>
+                      <a:endParaRPr/>
+                    </a:p>
+                  </a:txBody>
+                  <a:tcPr/>
+                </a:tc>
+                <a:tc>
+                  <a:txBody>
+                    <a:bodyPr/>
+                    <a:lstStyle/>
+                    <a:p>
+                      <a:pPr lvl="0" indent="0" marL="0">
+                        <a:buNone/>
+                      </a:pPr>
+                      <a:r>
+                        <a:rPr/>
+                        <a:t>Before-After</a:t>
+                      </a:r>
+                    </a:p>
+                  </a:txBody>
+                  <a:tcPr/>
+                </a:tc>
+                <a:tc>
+                  <a:txBody>
+                    <a:bodyPr/>
+                    <a:lstStyle/>
+                    <a:p>
+                      <a:pPr lvl="0" indent="0" marL="0">
+                        <a:buNone/>
+                      </a:pPr>
+                      <a:r>
+                        <a:rPr/>
+                        <a:t>With-Without</a:t>
+                      </a:r>
+                    </a:p>
+                  </a:txBody>
+                  <a:tcPr/>
+                </a:tc>
+              </a:tr>
               <a:tr h="0">
                 <a:tc>
                   <a:txBody>
@@ -3266,7 +3311,7 @@
                       </a:pPr>
                       <a:r>
                         <a:rPr/>
-                        <a:t>14489.694***</a:t>
+                        <a:t>1448.969***</a:t>
                       </a:r>
                     </a:p>
                   </a:txBody>
@@ -3281,7 +3326,7 @@
                       </a:pPr>
                       <a:r>
                         <a:rPr/>
-                        <a:t>22304.911***</a:t>
+                        <a:t>2230.491***</a:t>
                       </a:r>
                     </a:p>
                   </a:txBody>
@@ -3307,7 +3352,7 @@
                       </a:pPr>
                       <a:r>
                         <a:rPr/>
-                        <a:t>(145.961)</a:t>
+                        <a:t>(14.596)</a:t>
                       </a:r>
                     </a:p>
                   </a:txBody>
@@ -3322,7 +3367,7 @@
                       </a:pPr>
                       <a:r>
                         <a:rPr/>
-                        <a:t>(337.418)</a:t>
+                        <a:t>(33.742)</a:t>
                       </a:r>
                     </a:p>
                   </a:txBody>
@@ -3354,7 +3399,7 @@
                       </a:pPr>
                       <a:r>
                         <a:rPr/>
-                        <a:t>-6649.515***</a:t>
+                        <a:t>-664.952***</a:t>
                       </a:r>
                     </a:p>
                   </a:txBody>
@@ -3389,7 +3434,7 @@
                       </a:pPr>
                       <a:r>
                         <a:rPr/>
-                        <a:t>(230.017)</a:t>
+                        <a:t>(23.002)</a:t>
                       </a:r>
                     </a:p>
                   </a:txBody>
@@ -3439,7 +3484,7 @@
                       </a:pPr>
                       <a:r>
                         <a:rPr/>
-                        <a:t>-14464.732***</a:t>
+                        <a:t>-1446.473***</a:t>
                       </a:r>
                     </a:p>
                   </a:txBody>
@@ -3474,7 +3519,7 @@
                       </a:pPr>
                       <a:r>
                         <a:rPr/>
-                        <a:t>(330.470)</a:t>
+                        <a:t>(33.047)</a:t>
                       </a:r>
                     </a:p>
                   </a:txBody>
@@ -3617,6 +3662,431 @@
 </file>
 
 <file path=ppt/slides/slide11.xml><?xml version="1.0" encoding="utf-8"?>
+<p:sld xmlns:a="http://schemas.openxmlformats.org/drawingml/2006/main" xmlns:r="http://schemas.openxmlformats.org/officeDocument/2006/relationships" xmlns:p="http://schemas.openxmlformats.org/presentationml/2006/main">
+  <p:cSld>
+    <p:spTree>
+      <p:nvGrpSpPr>
+        <p:cNvPr id="1" name=""/>
+        <p:cNvGrpSpPr/>
+        <p:nvPr/>
+      </p:nvGrpSpPr>
+      <p:grpSpPr>
+        <a:xfrm>
+          <a:off x="0" y="0"/>
+          <a:ext cx="0" cy="0"/>
+          <a:chOff x="0" y="0"/>
+          <a:chExt cx="0" cy="0"/>
+        </a:xfrm>
+      </p:grpSpPr>
+      <p:sp>
+        <p:nvSpPr>
+          <p:cNvPr id="2" name="Title 1"/>
+          <p:cNvSpPr>
+            <a:spLocks noGrp="1"/>
+          </p:cNvSpPr>
+          <p:nvPr>
+            <p:ph type="title"/>
+          </p:nvPr>
+        </p:nvSpPr>
+        <p:spPr>
+          <a:xfrm>
+            <a:off x="457201" y="204787"/>
+            <a:ext cx="3008313" cy="871538"/>
+          </a:xfrm>
+        </p:spPr>
+        <p:txBody>
+          <a:bodyPr/>
+          <a:lstStyle/>
+          <a:p>
+            <a:pPr lvl="0" indent="0" marL="0">
+              <a:buNone/>
+            </a:pPr>
+            <a:r>
+              <a:rPr/>
+              <a:t>Conditions for Impact Evaluation</a:t>
+            </a:r>
+          </a:p>
+        </p:txBody>
+      </p:sp>
+      <p:sp>
+        <p:nvSpPr>
+          <p:cNvPr id="4" name="Text Placeholder 3"/>
+          <p:cNvSpPr>
+            <a:spLocks noGrp="1"/>
+          </p:cNvSpPr>
+          <p:nvPr>
+            <p:ph idx="2" sz="half" type="body"/>
+          </p:nvPr>
+        </p:nvSpPr>
+        <p:spPr/>
+        <p:txBody>
+          <a:bodyPr/>
+          <a:lstStyle/>
+          <a:p>
+            <a:pPr lvl="0" indent="0" marL="0">
+              <a:buNone/>
+            </a:pPr>
+            <a:r>
+              <a:rPr/>
+              <a:t>There are certain practical considerations and conditions that need to be met in order to conduct an impact evaluation.</a:t>
+            </a:r>
+          </a:p>
+        </p:txBody>
+      </p:sp>
+      <p:graphicFrame>
+        <p:nvGraphicFramePr>
+          <p:cNvPr id="6" name="Content Placeholder 5"/>
+          <p:cNvGraphicFramePr>
+            <a:graphicFrameLocks noGrp="1"/>
+          </p:cNvGraphicFramePr>
+          <p:nvPr>
+            <p:ph idx="1"/>
+          </p:nvPr>
+        </p:nvGraphicFramePr>
+        <p:xfrm>
+          <a:off x="3568700" y="203200"/>
+          <a:ext cx="5105400" cy="3873500"/>
+        </p:xfrm>
+        <a:graphic>
+          <a:graphicData uri="http://schemas.openxmlformats.org/drawingml/2006/table">
+            <a:tbl>
+              <a:tblPr firstRow="1" bandRow="1">
+                <a:tableStyleId>{5C22544A-7EE6-4342-B048-85BDC9FD1C3A}</a:tableStyleId>
+              </a:tblPr>
+              <a:tblGrid>
+                <a:gridCol w="596900"/>
+                <a:gridCol w="4508500"/>
+              </a:tblGrid>
+              <a:tr h="0">
+                <a:tc>
+                  <a:txBody>
+                    <a:bodyPr/>
+                    <a:lstStyle/>
+                    <a:p>
+                      <a:pPr lvl="0" indent="0" marL="0" algn="l">
+                        <a:buNone/>
+                      </a:pPr>
+                      <a:r>
+                        <a:rPr/>
+                        <a:t>Condition</a:t>
+                      </a:r>
+                    </a:p>
+                  </a:txBody>
+                  <a:tcPr/>
+                </a:tc>
+                <a:tc>
+                  <a:txBody>
+                    <a:bodyPr/>
+                    <a:lstStyle/>
+                    <a:p>
+                      <a:pPr lvl="0" indent="0" marL="0" algn="l">
+                        <a:buNone/>
+                      </a:pPr>
+                      <a:r>
+                        <a:rPr/>
+                        <a:t>Description</a:t>
+                      </a:r>
+                    </a:p>
+                  </a:txBody>
+                  <a:tcPr/>
+                </a:tc>
+              </a:tr>
+              <a:tr h="0">
+                <a:tc>
+                  <a:txBody>
+                    <a:bodyPr/>
+                    <a:lstStyle/>
+                    <a:p>
+                      <a:pPr lvl="0" indent="0" marL="0" algn="l">
+                        <a:buNone/>
+                      </a:pPr>
+                      <a:r>
+                        <a:rPr/>
+                        <a:t>Intervention</a:t>
+                      </a:r>
+                    </a:p>
+                  </a:txBody>
+                </a:tc>
+                <a:tc>
+                  <a:txBody>
+                    <a:bodyPr/>
+                    <a:lstStyle/>
+                    <a:p>
+                      <a:pPr lvl="0" indent="0" marL="0" algn="l">
+                        <a:buNone/>
+                      </a:pPr>
+                      <a:r>
+                        <a:rPr/>
+                        <a:t>The project, program or policy which is the subject of the impact evaluation. Should be clearly defined, with a known start time and duration as well as clearly defined eligibility criteria.</a:t>
+                      </a:r>
+                    </a:p>
+                  </a:txBody>
+                </a:tc>
+              </a:tr>
+              <a:tr h="0">
+                <a:tc>
+                  <a:txBody>
+                    <a:bodyPr/>
+                    <a:lstStyle/>
+                    <a:p>
+                      <a:pPr lvl="0" indent="0" marL="0" algn="l">
+                        <a:buNone/>
+                      </a:pPr>
+                      <a:r>
+                        <a:rPr/>
+                        <a:t>Outcome(s)</a:t>
+                      </a:r>
+                    </a:p>
+                  </a:txBody>
+                </a:tc>
+                <a:tc>
+                  <a:txBody>
+                    <a:bodyPr/>
+                    <a:lstStyle/>
+                    <a:p>
+                      <a:pPr lvl="0" indent="0" marL="0" algn="l">
+                        <a:buNone/>
+                      </a:pPr>
+                      <a:r>
+                        <a:rPr/>
+                        <a:t>One or more clearly defined, observable, and measurable outcomes of interest.</a:t>
+                      </a:r>
+                    </a:p>
+                  </a:txBody>
+                </a:tc>
+              </a:tr>
+              <a:tr h="0">
+                <a:tc>
+                  <a:txBody>
+                    <a:bodyPr/>
+                    <a:lstStyle/>
+                    <a:p>
+                      <a:pPr lvl="0" indent="0" marL="0" algn="l">
+                        <a:buNone/>
+                      </a:pPr>
+                      <a:r>
+                        <a:rPr/>
+                        <a:t>Problem Diagnosis</a:t>
+                      </a:r>
+                    </a:p>
+                  </a:txBody>
+                </a:tc>
+                <a:tc>
+                  <a:txBody>
+                    <a:bodyPr/>
+                    <a:lstStyle/>
+                    <a:p>
+                      <a:pPr lvl="0" indent="0" marL="0" algn="l">
+                        <a:buNone/>
+                      </a:pPr>
+                      <a:r>
+                        <a:rPr/>
+                        <a:t>A proposed program or intervention should be developed based on a sound analysis of a particular social or development need and the binding constraints and root causes (i.e., to ensure the solution matches the problem).</a:t>
+                      </a:r>
+                    </a:p>
+                  </a:txBody>
+                </a:tc>
+              </a:tr>
+              <a:tr h="0">
+                <a:tc>
+                  <a:txBody>
+                    <a:bodyPr/>
+                    <a:lstStyle/>
+                    <a:p>
+                      <a:pPr lvl="0" indent="0" marL="0" algn="l">
+                        <a:buNone/>
+                      </a:pPr>
+                      <a:r>
+                        <a:rPr/>
+                        <a:t>Theory of Change</a:t>
+                      </a:r>
+                    </a:p>
+                  </a:txBody>
+                </a:tc>
+                <a:tc>
+                  <a:txBody>
+                    <a:bodyPr/>
+                    <a:lstStyle/>
+                    <a:p>
+                      <a:pPr lvl="0" indent="0" marL="0" algn="l">
+                        <a:buNone/>
+                      </a:pPr>
+                      <a:r>
+                        <a:rPr/>
+                        <a:t>A sound, well-constructed theory of change explaining expected causal pathways linking inputs, outputs, and outcomes, including a description and key assumptions associated with each causal step.</a:t>
+                      </a:r>
+                    </a:p>
+                  </a:txBody>
+                </a:tc>
+              </a:tr>
+              <a:tr h="0">
+                <a:tc>
+                  <a:txBody>
+                    <a:bodyPr/>
+                    <a:lstStyle/>
+                    <a:p>
+                      <a:pPr lvl="0" indent="0" marL="0" algn="l">
+                        <a:buNone/>
+                      </a:pPr>
+                      <a:r>
+                        <a:rPr/>
+                        <a:t>Sufficient dose and duration</a:t>
+                      </a:r>
+                    </a:p>
+                  </a:txBody>
+                </a:tc>
+                <a:tc>
+                  <a:txBody>
+                    <a:bodyPr/>
+                    <a:lstStyle/>
+                    <a:p>
+                      <a:pPr lvl="0" indent="0" marL="0" algn="l">
+                        <a:buNone/>
+                      </a:pPr>
+                      <a:r>
+                        <a:rPr/>
+                        <a:t>The intervention should be of a sufficient scope, scale, and duration to theoretically produce the intended effect within the time frame of observation.</a:t>
+                      </a:r>
+                    </a:p>
+                  </a:txBody>
+                </a:tc>
+              </a:tr>
+              <a:tr h="0">
+                <a:tc>
+                  <a:txBody>
+                    <a:bodyPr/>
+                    <a:lstStyle/>
+                    <a:p>
+                      <a:pPr lvl="0" indent="0" marL="0" algn="l">
+                        <a:buNone/>
+                      </a:pPr>
+                      <a:r>
+                        <a:rPr/>
+                        <a:t>Counterfactual</a:t>
+                      </a:r>
+                    </a:p>
+                  </a:txBody>
+                </a:tc>
+                <a:tc>
+                  <a:txBody>
+                    <a:bodyPr/>
+                    <a:lstStyle/>
+                    <a:p>
+                      <a:pPr lvl="0" indent="0" marL="0" algn="l">
+                        <a:buNone/>
+                      </a:pPr>
+                      <a:r>
+                        <a:rPr/>
+                        <a:t>A clearly defined hypothetical counterfactual, operationalized using a credible identification strategy.</a:t>
+                      </a:r>
+                    </a:p>
+                  </a:txBody>
+                </a:tc>
+              </a:tr>
+              <a:tr h="0">
+                <a:tc>
+                  <a:txBody>
+                    <a:bodyPr/>
+                    <a:lstStyle/>
+                    <a:p>
+                      <a:pPr lvl="0" indent="0" marL="0" algn="l">
+                        <a:buNone/>
+                      </a:pPr>
+                      <a:r>
+                        <a:rPr/>
+                        <a:t>Data Quality</a:t>
+                      </a:r>
+                    </a:p>
+                  </a:txBody>
+                </a:tc>
+                <a:tc>
+                  <a:txBody>
+                    <a:bodyPr/>
+                    <a:lstStyle/>
+                    <a:p>
+                      <a:pPr lvl="0" indent="0" marL="0" algn="l">
+                        <a:buNone/>
+                      </a:pPr>
+                      <a:r>
+                        <a:rPr/>
+                        <a:t>Reasonably accurate, complete data, with minimal or no systematic bias.</a:t>
+                      </a:r>
+                    </a:p>
+                  </a:txBody>
+                </a:tc>
+              </a:tr>
+              <a:tr h="0">
+                <a:tc>
+                  <a:txBody>
+                    <a:bodyPr/>
+                    <a:lstStyle/>
+                    <a:p>
+                      <a:pPr lvl="0" indent="0" marL="0" algn="l">
+                        <a:buNone/>
+                      </a:pPr>
+                      <a:r>
+                        <a:rPr/>
+                        <a:t>Data Sufficiency</a:t>
+                      </a:r>
+                    </a:p>
+                  </a:txBody>
+                </a:tc>
+                <a:tc>
+                  <a:txBody>
+                    <a:bodyPr/>
+                    <a:lstStyle/>
+                    <a:p>
+                      <a:pPr lvl="0" indent="0" marL="0" algn="l">
+                        <a:buNone/>
+                      </a:pPr>
+                      <a:r>
+                        <a:rPr/>
+                        <a:t>Sufficient data to enable statistical comparison of outcomes between intervention and comparison groups.</a:t>
+                      </a:r>
+                    </a:p>
+                  </a:txBody>
+                </a:tc>
+              </a:tr>
+            </a:tbl>
+          </a:graphicData>
+        </a:graphic>
+      </p:graphicFrame>
+      <p:sp>
+        <p:nvSpPr>
+          <p:cNvPr id="1" name="TextBox 3"/>
+          <p:cNvSpPr txBox="1"/>
+          <p:nvPr/>
+        </p:nvSpPr>
+        <p:spPr>
+          <a:xfrm>
+            <a:off x="3568700" y="4076700"/>
+            <a:ext cx="5105400" cy="508000"/>
+          </a:xfrm>
+          <a:prstGeom prst="rect">
+            <a:avLst/>
+          </a:prstGeom>
+          <a:noFill/>
+        </p:spPr>
+        <p:txBody>
+          <a:bodyPr/>
+          <a:lstStyle/>
+          <a:p>
+            <a:pPr lvl="0" indent="0" marL="0" algn="ctr">
+              <a:buNone/>
+            </a:pPr>
+            <a:r>
+              <a:rPr/>
+              <a:t>Conditions for a Credible Impact Evaluation</a:t>
+            </a:r>
+          </a:p>
+        </p:txBody>
+      </p:sp>
+    </p:spTree>
+  </p:cSld>
+</p:sld>
+</file>
+
+<file path=ppt/slides/slide12.xml><?xml version="1.0" encoding="utf-8"?>
 <p:sld xmlns:a="http://schemas.openxmlformats.org/drawingml/2006/main" xmlns:r="http://schemas.openxmlformats.org/officeDocument/2006/relationships" xmlns:p="http://schemas.openxmlformats.org/presentationml/2006/main">
   <p:cSld>
     <p:spTree>
@@ -4068,7 +4538,7 @@
 </p:sld>
 </file>
 
-<file path=ppt/slides/slide12.xml><?xml version="1.0" encoding="utf-8"?>
+<file path=ppt/slides/slide13.xml><?xml version="1.0" encoding="utf-8"?>
 <p:sld xmlns:a="http://schemas.openxmlformats.org/drawingml/2006/main" xmlns:r="http://schemas.openxmlformats.org/officeDocument/2006/relationships" xmlns:p="http://schemas.openxmlformats.org/presentationml/2006/main">
   <p:cSld>
     <p:spTree>
@@ -4444,7 +4914,7 @@
 </p:sld>
 </file>
 
-<file path=ppt/slides/slide13.xml><?xml version="1.0" encoding="utf-8"?>
+<file path=ppt/slides/slide14.xml><?xml version="1.0" encoding="utf-8"?>
 <p:sld xmlns:a="http://schemas.openxmlformats.org/drawingml/2006/main" xmlns:r="http://schemas.openxmlformats.org/officeDocument/2006/relationships" xmlns:p="http://schemas.openxmlformats.org/presentationml/2006/main">
   <p:cSld>
     <p:spTree>
@@ -5506,7 +5976,7 @@
             <a:pPr lvl="0"/>
             <a:r>
               <a:rPr/>
-              <a:t>Government program subsidizing waste management new technologies</a:t>
+              <a:t>Government program subsidizing innovative waste management technologies</a:t>
             </a:r>
           </a:p>
           <a:p>
@@ -5527,7 +5997,7 @@
             <a:pPr lvl="0"/>
             <a:r>
               <a:rPr/>
-              <a:t>Decision criterion: Program must reduce waste management at least $10,000</a:t>
+              <a:t>Decision criterion: Program must reduce waste management costs by at least 1,000 AED per year</a:t>
             </a:r>
           </a:p>
         </p:txBody>
@@ -5845,7 +6315,7 @@
             </a:r>
             <a:r>
               <a:rPr/>
-              <a:t>: Waste managament incurred monthly per industry (USD)</a:t>
+              <a:t>: Waste management costs incurred yearly per business (AED)</a:t>
             </a:r>
           </a:p>
           <a:p>
@@ -5884,7 +6354,7 @@
             </a:r>
             <a:r>
               <a:rPr/>
-              <a:t>: Industry enrolled in program (0/1)</a:t>
+              <a:t>: Business offered the program (0/1)</a:t>
             </a:r>
           </a:p>
           <a:p>
@@ -5897,7 +6367,7 @@
             </a:r>
             <a:r>
               <a:rPr/>
-              <a:t>: Industry eligible for program (0/1)</a:t>
+              <a:t>: Business eligible for the program (0/1)</a:t>
             </a:r>
           </a:p>
         </p:txBody>
@@ -7381,9 +7851,8 @@
                 </a:solidFill>
                 <a:latin typeface="Courier"/>
               </a:rPr>
-              <a:t># We multiply the outcome variable by 1,000</a:t>
-            </a:r>
-            <a:br/>
+              <a:t># We multiply the outcome variable by 100</a:t>
+            </a:r>
             <a:br/>
             <a:r>
               <a:rPr>
@@ -7446,7 +7915,28 @@
                 </a:solidFill>
                 <a:latin typeface="Courier"/>
               </a:rPr>
-              <a:t>1000</a:t>
+              <a:t>100</a:t>
+            </a:r>
+            <a:br/>
+            <a:br/>
+            <a:r>
+              <a:rPr>
+                <a:solidFill>
+                  <a:srgbClr val="5E5E5E"/>
+                </a:solidFill>
+                <a:latin typeface="Courier"/>
+              </a:rPr>
+              <a:t># New data, with new variable names</a:t>
+            </a:r>
+            <a:br/>
+            <a:r>
+              <a:rPr>
+                <a:solidFill>
+                  <a:srgbClr val="5E5E5E"/>
+                </a:solidFill>
+                <a:latin typeface="Courier"/>
+              </a:rPr>
+              <a:t># df &lt;- read.csv("./evaluation_data_GreenWaste.csv")</a:t>
             </a:r>
           </a:p>
           <a:p>
@@ -7466,6 +7956,57 @@
             <a:r>
               <a:rPr>
                 <a:solidFill>
+                  <a:srgbClr val="5E5E5E"/>
+                </a:solidFill>
+                <a:latin typeface="Courier"/>
+              </a:rPr>
+              <a:t># Fit a linear regression model using 'lm_robust' from the 'estimatr' package</a:t>
+            </a:r>
+            <a:br/>
+            <a:r>
+              <a:rPr>
+                <a:solidFill>
+                  <a:srgbClr val="5E5E5E"/>
+                </a:solidFill>
+                <a:latin typeface="Courier"/>
+              </a:rPr>
+              <a:t># 'lm_robust' gives regression results with robust (heteroskedasticity-consistent) standard errors</a:t>
+            </a:r>
+            <a:br/>
+            <a:br/>
+            <a:r>
+              <a:rPr>
+                <a:solidFill>
+                  <a:srgbClr val="5E5E5E"/>
+                </a:solidFill>
+                <a:latin typeface="Courier"/>
+              </a:rPr>
+              <a:t># Formula: outcome variable ~ explanatory variable</a:t>
+            </a:r>
+            <a:br/>
+            <a:r>
+              <a:rPr>
+                <a:solidFill>
+                  <a:srgbClr val="5E5E5E"/>
+                </a:solidFill>
+                <a:latin typeface="Courier"/>
+              </a:rPr>
+              <a:t># Clustered standard errors at the 'zone_identifier' level</a:t>
+            </a:r>
+            <a:br/>
+            <a:r>
+              <a:rPr>
+                <a:solidFill>
+                  <a:srgbClr val="5E5E5E"/>
+                </a:solidFill>
+                <a:latin typeface="Courier"/>
+              </a:rPr>
+              <a:t># Filter df to only run the regression on industries in treatment zones AND enrolled</a:t>
+            </a:r>
+            <a:br/>
+            <a:r>
+              <a:rPr>
+                <a:solidFill>
                   <a:srgbClr val="003B4F"/>
                 </a:solidFill>
                 <a:latin typeface="Courier"/>
@@ -7688,6 +8229,22 @@
             </a:pPr>
             <a:r>
               <a:rPr b="1"/>
+              <a:t>Discussion</a:t>
+            </a:r>
+          </a:p>
+          <a:p>
+            <a:pPr lvl="0"/>
+            <a:r>
+              <a:rPr/>
+              <a:t>Is this effect due to the program? What are some other external factors that may cause a change in costs for waste management over time?</a:t>
+            </a:r>
+          </a:p>
+          <a:p>
+            <a:pPr lvl="0" indent="0" marL="0">
+              <a:buNone/>
+            </a:pPr>
+            <a:r>
+              <a:rPr b="1"/>
               <a:t>Problems</a:t>
             </a:r>
             <a:r>
@@ -7699,7 +8256,7 @@
             <a:pPr lvl="0"/>
             <a:r>
               <a:rPr/>
-              <a:t>External factors also change over time (e.g., economic conditions, other government programs)</a:t>
+              <a:t>External factors also change over time</a:t>
             </a:r>
           </a:p>
           <a:p>
@@ -7798,7 +8355,56 @@
                                         <p:tgtEl>
                                           <p:spTgt spid="3">
                                             <p:txEl>
-                                              <p:pRg st="4" end="4"/>
+                                              <p:pRg st="5" end="5"/>
+                                            </p:txEl>
+                                          </p:spTgt>
+                                        </p:tgtEl>
+                                        <p:attrNameLst>
+                                          <p:attrName>style.visibility</p:attrName>
+                                        </p:attrNameLst>
+                                      </p:cBhvr>
+                                      <p:to>
+                                        <p:strVal val="visible"/>
+                                      </p:to>
+                                    </p:set>
+                                  </p:childTnLst>
+                                </p:cTn>
+                              </p:par>
+                            </p:childTnLst>
+                          </p:cTn>
+                        </p:par>
+                      </p:childTnLst>
+                    </p:cTn>
+                  </p:par>
+                  <p:par>
+                    <p:cTn id="11" fill="hold">
+                      <p:stCondLst>
+                        <p:cond delay="indefinite"/>
+                      </p:stCondLst>
+                      <p:childTnLst>
+                        <p:par>
+                          <p:cTn id="12" fill="hold">
+                            <p:stCondLst>
+                              <p:cond delay="0"/>
+                            </p:stCondLst>
+                            <p:childTnLst>
+                              <p:par>
+                                <p:cTn id="13" presetID="1" presetClass="entr" presetSubtype="0" fill="hold" grpId="0" nodeType="clickEffect">
+                                  <p:stCondLst>
+                                    <p:cond delay="0"/>
+                                  </p:stCondLst>
+                                  <p:childTnLst>
+                                    <p:set>
+                                      <p:cBhvr>
+                                        <p:cTn id="14" dur="1" fill="hold">
+                                          <p:stCondLst>
+                                            <p:cond delay="0"/>
+                                          </p:stCondLst>
+                                        </p:cTn>
+                                        <p:tgtEl>
+                                          <p:spTgt spid="3">
+                                            <p:txEl>
+                                              <p:pRg st="6" end="6"/>
                                             </p:txEl>
                                           </p:spTgt>
                                         </p:tgtEl>
@@ -7917,6 +8523,27 @@
               <a:t># Compare enrolled vs. non-enrolled households after program implementation</a:t>
             </a:r>
             <a:br/>
+            <a:br/>
+            <a:r>
+              <a:rPr>
+                <a:solidFill>
+                  <a:srgbClr val="5E5E5E"/>
+                </a:solidFill>
+                <a:latin typeface="Courier"/>
+              </a:rPr>
+              <a:t># Use lm_robust as before, with clustered std errors</a:t>
+            </a:r>
+            <a:br/>
+            <a:r>
+              <a:rPr>
+                <a:solidFill>
+                  <a:srgbClr val="5E5E5E"/>
+                </a:solidFill>
+                <a:latin typeface="Courier"/>
+              </a:rPr>
+              <a:t># This time, we filter df to run the regression on industries in treatment zones AND after the intervention, in the follow-up survey round</a:t>
+            </a:r>
+            <a:br/>
             <a:r>
               <a:rPr>
                 <a:solidFill>
@@ -8125,6 +8752,22 @@
                 <a:latin typeface="Courier"/>
               </a:rPr>
               <a:t>))</a:t>
+            </a:r>
+          </a:p>
+          <a:p>
+            <a:pPr lvl="0" indent="0" marL="0">
+              <a:buNone/>
+            </a:pPr>
+            <a:r>
+              <a:rPr b="1"/>
+              <a:t>Discussion</a:t>
+            </a:r>
+          </a:p>
+          <a:p>
+            <a:pPr lvl="0"/>
+            <a:r>
+              <a:rPr/>
+              <a:t>Are the enrolled industries the same as those that were not enrolled in the program? How might they be different from one another?</a:t>
             </a:r>
           </a:p>
           <a:p>
@@ -8243,7 +8886,56 @@
                                         <p:tgtEl>
                                           <p:spTgt spid="3">
                                             <p:txEl>
-                                              <p:pRg st="3" end="3"/>
+                                              <p:pRg st="4" end="4"/>
+                                            </p:txEl>
+                                          </p:spTgt>
+                                        </p:tgtEl>
+                                        <p:attrNameLst>
+                                          <p:attrName>style.visibility</p:attrName>
+                                        </p:attrNameLst>
+                                      </p:cBhvr>
+                                      <p:to>
+                                        <p:strVal val="visible"/>
+                                      </p:to>
+                                    </p:set>
+                                  </p:childTnLst>
+                                </p:cTn>
+                              </p:par>
+                            </p:childTnLst>
+                          </p:cTn>
+                        </p:par>
+                      </p:childTnLst>
+                    </p:cTn>
+                  </p:par>
+                  <p:par>
+                    <p:cTn id="11" fill="hold">
+                      <p:stCondLst>
+                        <p:cond delay="indefinite"/>
+                      </p:stCondLst>
+                      <p:childTnLst>
+                        <p:par>
+                          <p:cTn id="12" fill="hold">
+                            <p:stCondLst>
+                              <p:cond delay="0"/>
+                            </p:stCondLst>
+                            <p:childTnLst>
+                              <p:par>
+                                <p:cTn id="13" presetID="1" presetClass="entr" presetSubtype="0" fill="hold" grpId="0" nodeType="clickEffect">
+                                  <p:stCondLst>
+                                    <p:cond delay="0"/>
+                                  </p:stCondLst>
+                                  <p:childTnLst>
+                                    <p:set>
+                                      <p:cBhvr>
+                                        <p:cTn id="14" dur="1" fill="hold">
+                                          <p:stCondLst>
+                                            <p:cond delay="0"/>
+                                          </p:stCondLst>
+                                        </p:cTn>
+                                        <p:tgtEl>
+                                          <p:spTgt spid="3">
+                                            <p:txEl>
+                                              <p:pRg st="5" end="5"/>
                                             </p:txEl>
                                           </p:spTgt>
                                         </p:tgtEl>
